--- a/03/03_eloadas_HTTP_protokollok_fejlodese.pptx
+++ b/03/03_eloadas_HTTP_protokollok_fejlodese.pptx
@@ -214,7 +214,7 @@
           <a:p>
             <a:fld id="{4C482E4E-5CEC-44A9-BF2B-512FB3B5604F}" type="datetimeFigureOut">
               <a:rPr lang="en-US" smtClean="0"/>
-              <a:t>2/16/2026</a:t>
+              <a:t>2/20/2026</a:t>
             </a:fld>
             <a:endParaRPr lang="en-US"/>
           </a:p>
@@ -2258,12 +2258,8 @@
           </a:p>
           <a:p>
             <a:r>
-              <a:rPr lang="hu-HU"/>
-              <a:t>Megjegyzés: A </a:t>
-            </a:r>
-            <a:r>
               <a:rPr lang="hu-HU" dirty="0"/>
-              <a:t>HTTP/1.1 protokollt még mindig sok helyen használják, ez is mutatja, hogy 2 évtizedes működése során mennyire elterjedt és a hátrányai ellenére sok helyen megfelelően és megbízhatóan használható.</a:t>
+              <a:t>Megjegyzés: A HTTP/1.1 protokollt még mindig sok helyen használják, ez is mutatja, hogy 2 évtizedes működése során mennyire elterjedt és a hátrányai ellenére sok helyen megfelelően és megbízhatóan használható.</a:t>
             </a:r>
           </a:p>
           <a:p>
@@ -6140,7 +6136,7 @@
           <a:p>
             <a:r>
               <a:rPr lang="hu-HU" dirty="0"/>
-              <a:t>Megjegyzés: A Google GRPC protokollja HHTP/2 felett működik, ami erősen épít a Server </a:t>
+              <a:t>Megjegyzés: A Google GRPC protokollja HTTP/2 felett működik, ami erősen épít a Server </a:t>
             </a:r>
             <a:r>
               <a:rPr lang="hu-HU" dirty="0" err="1"/>
@@ -6677,7 +6673,7 @@
           <a:p>
             <a:fld id="{E80C50CD-E178-4744-9B35-B2F624D6C5E9}" type="datetimeFigureOut">
               <a:rPr lang="en-US" smtClean="0"/>
-              <a:t>2/16/2026</a:t>
+              <a:t>2/20/2026</a:t>
             </a:fld>
             <a:endParaRPr lang="en-US"/>
           </a:p>
@@ -6875,7 +6871,7 @@
           <a:p>
             <a:fld id="{E80C50CD-E178-4744-9B35-B2F624D6C5E9}" type="datetimeFigureOut">
               <a:rPr lang="en-US" smtClean="0"/>
-              <a:t>2/16/2026</a:t>
+              <a:t>2/20/2026</a:t>
             </a:fld>
             <a:endParaRPr lang="en-US"/>
           </a:p>
@@ -7083,7 +7079,7 @@
           <a:p>
             <a:fld id="{E80C50CD-E178-4744-9B35-B2F624D6C5E9}" type="datetimeFigureOut">
               <a:rPr lang="en-US" smtClean="0"/>
-              <a:t>2/16/2026</a:t>
+              <a:t>2/20/2026</a:t>
             </a:fld>
             <a:endParaRPr lang="en-US"/>
           </a:p>
@@ -7333,7 +7329,7 @@
           <a:p>
             <a:fld id="{E80C50CD-E178-4744-9B35-B2F624D6C5E9}" type="datetimeFigureOut">
               <a:rPr lang="en-US" smtClean="0"/>
-              <a:t>2/16/2026</a:t>
+              <a:t>2/20/2026</a:t>
             </a:fld>
             <a:endParaRPr lang="en-US"/>
           </a:p>
@@ -7612,7 +7608,7 @@
           <a:p>
             <a:fld id="{E80C50CD-E178-4744-9B35-B2F624D6C5E9}" type="datetimeFigureOut">
               <a:rPr lang="en-US" smtClean="0"/>
-              <a:t>2/16/2026</a:t>
+              <a:t>2/20/2026</a:t>
             </a:fld>
             <a:endParaRPr lang="en-US"/>
           </a:p>
@@ -7929,7 +7925,7 @@
           <a:p>
             <a:fld id="{E80C50CD-E178-4744-9B35-B2F624D6C5E9}" type="datetimeFigureOut">
               <a:rPr lang="en-US" smtClean="0"/>
-              <a:t>2/16/2026</a:t>
+              <a:t>2/20/2026</a:t>
             </a:fld>
             <a:endParaRPr lang="en-US"/>
           </a:p>
@@ -8345,7 +8341,7 @@
           <a:p>
             <a:fld id="{E80C50CD-E178-4744-9B35-B2F624D6C5E9}" type="datetimeFigureOut">
               <a:rPr lang="en-US" smtClean="0"/>
-              <a:t>2/16/2026</a:t>
+              <a:t>2/20/2026</a:t>
             </a:fld>
             <a:endParaRPr lang="en-US"/>
           </a:p>
@@ -8486,7 +8482,7 @@
           <a:p>
             <a:fld id="{E80C50CD-E178-4744-9B35-B2F624D6C5E9}" type="datetimeFigureOut">
               <a:rPr lang="en-US" smtClean="0"/>
-              <a:t>2/16/2026</a:t>
+              <a:t>2/20/2026</a:t>
             </a:fld>
             <a:endParaRPr lang="en-US"/>
           </a:p>
@@ -8599,7 +8595,7 @@
           <a:p>
             <a:fld id="{E80C50CD-E178-4744-9B35-B2F624D6C5E9}" type="datetimeFigureOut">
               <a:rPr lang="en-US" smtClean="0"/>
-              <a:t>2/16/2026</a:t>
+              <a:t>2/20/2026</a:t>
             </a:fld>
             <a:endParaRPr lang="en-US"/>
           </a:p>
@@ -8916,7 +8912,7 @@
           <a:p>
             <a:fld id="{E80C50CD-E178-4744-9B35-B2F624D6C5E9}" type="datetimeFigureOut">
               <a:rPr lang="en-US" smtClean="0"/>
-              <a:t>2/16/2026</a:t>
+              <a:t>2/20/2026</a:t>
             </a:fld>
             <a:endParaRPr lang="en-US"/>
           </a:p>
@@ -9208,7 +9204,7 @@
           <a:p>
             <a:fld id="{E80C50CD-E178-4744-9B35-B2F624D6C5E9}" type="datetimeFigureOut">
               <a:rPr lang="en-US" smtClean="0"/>
-              <a:t>2/16/2026</a:t>
+              <a:t>2/20/2026</a:t>
             </a:fld>
             <a:endParaRPr lang="en-US"/>
           </a:p>
@@ -9448,7 +9444,7 @@
             <a:fld id="{E80C50CD-E178-4744-9B35-B2F624D6C5E9}" type="datetimeFigureOut">
               <a:rPr lang="en-US" smtClean="0"/>
               <a:pPr/>
-              <a:t>2/16/2026</a:t>
+              <a:t>2/20/2026</a:t>
             </a:fld>
             <a:endParaRPr lang="en-US"/>
           </a:p>
